--- a/MS Fabric/FUAM-Fabric-Unified-Admin-Monitoring-Presentation.pptx
+++ b/MS Fabric/FUAM-Fabric-Unified-Admin-Monitoring-Presentation.pptx
@@ -9,9 +9,9 @@
   </p:notesMasterIdLst>
   <p:sldIdLst>
     <p:sldId id="262" r:id="rId2"/>
-    <p:sldId id="263" r:id="rId3"/>
-    <p:sldId id="264" r:id="rId4"/>
-    <p:sldId id="265" r:id="rId5"/>
+    <p:sldId id="264" r:id="rId3"/>
+    <p:sldId id="265" r:id="rId4"/>
+    <p:sldId id="263" r:id="rId5"/>
     <p:sldId id="266" r:id="rId6"/>
     <p:sldId id="267" r:id="rId7"/>
   </p:sldIdLst>
@@ -1507,379 +1507,6 @@
         <p:cNvPr id="1" name="">
           <a:extLst>
             <a:ext uri="{FF2B5EF4-FFF2-40B4-BE49-F238E27FC236}">
-              <a16:creationId xmlns:a16="http://schemas.microsoft.com/office/drawing/2014/main" id="{A43D90CE-AEC8-6053-08CE-F5ED06CD51BE}"/>
-            </a:ext>
-          </a:extLst>
-        </p:cNvPr>
-        <p:cNvGrpSpPr/>
-        <p:nvPr/>
-      </p:nvGrpSpPr>
-      <p:grpSpPr>
-        <a:xfrm>
-          <a:off x="0" y="0"/>
-          <a:ext cx="0" cy="0"/>
-          <a:chOff x="0" y="0"/>
-          <a:chExt cx="0" cy="0"/>
-        </a:xfrm>
-      </p:grpSpPr>
-      <p:sp useBgFill="1">
-        <p:nvSpPr>
-          <p:cNvPr id="8" name="Rectangle 7">
-            <a:extLst>
-              <a:ext uri="{FF2B5EF4-FFF2-40B4-BE49-F238E27FC236}">
-                <a16:creationId xmlns:a16="http://schemas.microsoft.com/office/drawing/2014/main" id="{DF87F4C6-44B0-3DF0-A216-7937BA93B0FA}"/>
-              </a:ext>
-              <a:ext uri="{C183D7F6-B498-43B3-948B-1728B52AA6E4}">
-                <adec:decorative xmlns:adec="http://schemas.microsoft.com/office/drawing/2017/decorative" val="1"/>
-              </a:ext>
-            </a:extLst>
-          </p:cNvPr>
-          <p:cNvSpPr>
-            <a:spLocks noGrp="1" noRot="1" noChangeAspect="1" noMove="1" noResize="1" noEditPoints="1" noAdjustHandles="1" noChangeArrowheads="1" noChangeShapeType="1" noTextEdit="1"/>
-          </p:cNvSpPr>
-          <p:nvPr>
-            <p:extLst>
-              <p:ext uri="{386F3935-93C4-4BCD-93E2-E3B085C9AB24}">
-                <p16:designElem xmlns:p16="http://schemas.microsoft.com/office/powerpoint/2015/main" val="1"/>
-              </p:ext>
-            </p:extLst>
-          </p:nvPr>
-        </p:nvSpPr>
-        <p:spPr>
-          <a:xfrm>
-            <a:off x="0" y="0"/>
-            <a:ext cx="14630400" cy="8229600"/>
-          </a:xfrm>
-          <a:prstGeom prst="rect">
-            <a:avLst/>
-          </a:prstGeom>
-          <a:ln w="12700" cap="flat" cmpd="sng" algn="ctr">
-            <a:noFill/>
-            <a:prstDash val="solid"/>
-            <a:miter lim="800000"/>
-          </a:ln>
-          <a:effectLst/>
-          <a:extLst>
-            <a:ext uri="{91240B29-F687-4F45-9708-019B960494DF}">
-              <a14:hiddenLine xmlns:a14="http://schemas.microsoft.com/office/drawing/2010/main" w="12700" cap="flat" cmpd="sng" algn="ctr">
-                <a:solidFill>
-                  <a:schemeClr val="accent1">
-                    <a:shade val="50000"/>
-                  </a:schemeClr>
-                </a:solidFill>
-                <a:prstDash val="solid"/>
-                <a:miter lim="800000"/>
-              </a14:hiddenLine>
-            </a:ext>
-          </a:extLst>
-        </p:spPr>
-        <p:style>
-          <a:lnRef idx="2">
-            <a:schemeClr val="accent1">
-              <a:shade val="50000"/>
-            </a:schemeClr>
-          </a:lnRef>
-          <a:fillRef idx="1">
-            <a:schemeClr val="accent1"/>
-          </a:fillRef>
-          <a:effectRef idx="0">
-            <a:schemeClr val="accent1"/>
-          </a:effectRef>
-          <a:fontRef idx="minor">
-            <a:schemeClr val="lt1"/>
-          </a:fontRef>
-        </p:style>
-        <p:txBody>
-          <a:bodyPr rtlCol="0" anchor="ctr"/>
-          <a:lstStyle/>
-          <a:p>
-            <a:pPr algn="ctr"/>
-            <a:endParaRPr lang="en-US"/>
-          </a:p>
-        </p:txBody>
-      </p:sp>
-      <p:sp>
-        <p:nvSpPr>
-          <p:cNvPr id="10" name="Rectangle 9">
-            <a:extLst>
-              <a:ext uri="{FF2B5EF4-FFF2-40B4-BE49-F238E27FC236}">
-                <a16:creationId xmlns:a16="http://schemas.microsoft.com/office/drawing/2014/main" id="{02576538-0C7E-4AF0-35F9-1BFA62FBD948}"/>
-              </a:ext>
-              <a:ext uri="{C183D7F6-B498-43B3-948B-1728B52AA6E4}">
-                <adec:decorative xmlns:adec="http://schemas.microsoft.com/office/drawing/2017/decorative" val="1"/>
-              </a:ext>
-            </a:extLst>
-          </p:cNvPr>
-          <p:cNvSpPr>
-            <a:spLocks noGrp="1" noRot="1" noChangeAspect="1" noMove="1" noResize="1" noEditPoints="1" noAdjustHandles="1" noChangeArrowheads="1" noChangeShapeType="1" noTextEdit="1"/>
-          </p:cNvSpPr>
-          <p:nvPr>
-            <p:extLst>
-              <p:ext uri="{386F3935-93C4-4BCD-93E2-E3B085C9AB24}">
-                <p16:designElem xmlns:p16="http://schemas.microsoft.com/office/powerpoint/2015/main" val="1"/>
-              </p:ext>
-            </p:extLst>
-          </p:nvPr>
-        </p:nvSpPr>
-        <p:spPr>
-          <a:xfrm rot="16200000" flipH="1">
-            <a:off x="3199940" y="-3199426"/>
-            <a:ext cx="8229600" cy="14629480"/>
-          </a:xfrm>
-          <a:prstGeom prst="rect">
-            <a:avLst/>
-          </a:prstGeom>
-          <a:gradFill>
-            <a:gsLst>
-              <a:gs pos="8000">
-                <a:schemeClr val="accent1"/>
-              </a:gs>
-              <a:gs pos="100000">
-                <a:schemeClr val="accent1">
-                  <a:lumMod val="50000"/>
-                </a:schemeClr>
-              </a:gs>
-            </a:gsLst>
-            <a:lin ang="12000000" scaled="0"/>
-          </a:gradFill>
-          <a:ln>
-            <a:noFill/>
-          </a:ln>
-        </p:spPr>
-        <p:style>
-          <a:lnRef idx="2">
-            <a:schemeClr val="accent1">
-              <a:shade val="50000"/>
-            </a:schemeClr>
-          </a:lnRef>
-          <a:fillRef idx="1">
-            <a:schemeClr val="accent1"/>
-          </a:fillRef>
-          <a:effectRef idx="0">
-            <a:schemeClr val="accent1"/>
-          </a:effectRef>
-          <a:fontRef idx="minor">
-            <a:schemeClr val="lt1"/>
-          </a:fontRef>
-        </p:style>
-        <p:txBody>
-          <a:bodyPr rtlCol="0" anchor="ctr"/>
-          <a:lstStyle/>
-          <a:p>
-            <a:pPr algn="ctr"/>
-            <a:endParaRPr lang="en-US"/>
-          </a:p>
-        </p:txBody>
-      </p:sp>
-      <p:sp>
-        <p:nvSpPr>
-          <p:cNvPr id="12" name="Rectangle 11">
-            <a:extLst>
-              <a:ext uri="{FF2B5EF4-FFF2-40B4-BE49-F238E27FC236}">
-                <a16:creationId xmlns:a16="http://schemas.microsoft.com/office/drawing/2014/main" id="{FC87A92D-B937-2642-5AA0-6891AC65C31B}"/>
-              </a:ext>
-              <a:ext uri="{C183D7F6-B498-43B3-948B-1728B52AA6E4}">
-                <adec:decorative xmlns:adec="http://schemas.microsoft.com/office/drawing/2017/decorative" val="1"/>
-              </a:ext>
-            </a:extLst>
-          </p:cNvPr>
-          <p:cNvSpPr>
-            <a:spLocks noGrp="1" noRot="1" noChangeAspect="1" noMove="1" noResize="1" noEditPoints="1" noAdjustHandles="1" noChangeArrowheads="1" noChangeShapeType="1" noTextEdit="1"/>
-          </p:cNvSpPr>
-          <p:nvPr>
-            <p:extLst>
-              <p:ext uri="{386F3935-93C4-4BCD-93E2-E3B085C9AB24}">
-                <p16:designElem xmlns:p16="http://schemas.microsoft.com/office/powerpoint/2015/main" val="1"/>
-              </p:ext>
-            </p:extLst>
-          </p:nvPr>
-        </p:nvSpPr>
-        <p:spPr>
-          <a:xfrm rot="10800000" flipH="1">
-            <a:off x="-2773" y="0"/>
-            <a:ext cx="10885015" cy="8229086"/>
-          </a:xfrm>
-          <a:prstGeom prst="rect">
-            <a:avLst/>
-          </a:prstGeom>
-          <a:gradFill>
-            <a:gsLst>
-              <a:gs pos="8000">
-                <a:srgbClr val="000000">
-                  <a:alpha val="52000"/>
-                </a:srgbClr>
-              </a:gs>
-              <a:gs pos="100000">
-                <a:schemeClr val="accent1"/>
-              </a:gs>
-            </a:gsLst>
-            <a:lin ang="4800000" scaled="0"/>
-          </a:gradFill>
-          <a:ln>
-            <a:noFill/>
-          </a:ln>
-        </p:spPr>
-        <p:style>
-          <a:lnRef idx="2">
-            <a:schemeClr val="accent1">
-              <a:shade val="50000"/>
-            </a:schemeClr>
-          </a:lnRef>
-          <a:fillRef idx="1">
-            <a:schemeClr val="accent1"/>
-          </a:fillRef>
-          <a:effectRef idx="0">
-            <a:schemeClr val="accent1"/>
-          </a:effectRef>
-          <a:fontRef idx="minor">
-            <a:schemeClr val="lt1"/>
-          </a:fontRef>
-        </p:style>
-        <p:txBody>
-          <a:bodyPr rtlCol="0" anchor="ctr"/>
-          <a:lstStyle/>
-          <a:p>
-            <a:pPr algn="ctr"/>
-            <a:endParaRPr lang="en-US"/>
-          </a:p>
-        </p:txBody>
-      </p:sp>
-      <p:sp>
-        <p:nvSpPr>
-          <p:cNvPr id="14" name="Rectangle 13">
-            <a:extLst>
-              <a:ext uri="{FF2B5EF4-FFF2-40B4-BE49-F238E27FC236}">
-                <a16:creationId xmlns:a16="http://schemas.microsoft.com/office/drawing/2014/main" id="{8E6B5650-EB2A-78DD-C945-5C4E76E9C52E}"/>
-              </a:ext>
-              <a:ext uri="{C183D7F6-B498-43B3-948B-1728B52AA6E4}">
-                <adec:decorative xmlns:adec="http://schemas.microsoft.com/office/drawing/2017/decorative" val="1"/>
-              </a:ext>
-            </a:extLst>
-          </p:cNvPr>
-          <p:cNvSpPr>
-            <a:spLocks noGrp="1" noRot="1" noChangeAspect="1" noMove="1" noResize="1" noEditPoints="1" noAdjustHandles="1" noChangeArrowheads="1" noChangeShapeType="1" noTextEdit="1"/>
-          </p:cNvSpPr>
-          <p:nvPr>
-            <p:extLst>
-              <p:ext uri="{386F3935-93C4-4BCD-93E2-E3B085C9AB24}">
-                <p16:designElem xmlns:p16="http://schemas.microsoft.com/office/powerpoint/2015/main" val="1"/>
-              </p:ext>
-            </p:extLst>
-          </p:nvPr>
-        </p:nvSpPr>
-        <p:spPr>
-          <a:xfrm rot="16200000" flipH="1">
-            <a:off x="4379389" y="-2023008"/>
-            <a:ext cx="5873477" cy="14632255"/>
-          </a:xfrm>
-          <a:prstGeom prst="rect">
-            <a:avLst/>
-          </a:prstGeom>
-          <a:gradFill>
-            <a:gsLst>
-              <a:gs pos="0">
-                <a:schemeClr val="accent5">
-                  <a:lumMod val="60000"/>
-                  <a:lumOff val="40000"/>
-                  <a:alpha val="0"/>
-                </a:schemeClr>
-              </a:gs>
-              <a:gs pos="100000">
-                <a:srgbClr val="000000">
-                  <a:alpha val="46000"/>
-                </a:srgbClr>
-              </a:gs>
-            </a:gsLst>
-            <a:lin ang="1200000" scaled="0"/>
-          </a:gradFill>
-          <a:ln>
-            <a:noFill/>
-          </a:ln>
-        </p:spPr>
-        <p:style>
-          <a:lnRef idx="2">
-            <a:schemeClr val="accent1">
-              <a:shade val="50000"/>
-            </a:schemeClr>
-          </a:lnRef>
-          <a:fillRef idx="1">
-            <a:schemeClr val="accent1"/>
-          </a:fillRef>
-          <a:effectRef idx="0">
-            <a:schemeClr val="accent1"/>
-          </a:effectRef>
-          <a:fontRef idx="minor">
-            <a:schemeClr val="lt1"/>
-          </a:fontRef>
-        </p:style>
-        <p:txBody>
-          <a:bodyPr rtlCol="0" anchor="ctr"/>
-          <a:lstStyle/>
-          <a:p>
-            <a:pPr algn="ctr"/>
-            <a:endParaRPr lang="en-US"/>
-          </a:p>
-        </p:txBody>
-      </p:sp>
-      <p:pic>
-        <p:nvPicPr>
-          <p:cNvPr id="4" name="Picture 3">
-            <a:extLst>
-              <a:ext uri="{FF2B5EF4-FFF2-40B4-BE49-F238E27FC236}">
-                <a16:creationId xmlns:a16="http://schemas.microsoft.com/office/drawing/2014/main" id="{D80DA688-E227-7D27-086A-A8CE66B55267}"/>
-              </a:ext>
-            </a:extLst>
-          </p:cNvPr>
-          <p:cNvPicPr>
-            <a:picLocks noChangeAspect="1"/>
-          </p:cNvPicPr>
-          <p:nvPr/>
-        </p:nvPicPr>
-        <p:blipFill>
-          <a:blip r:embed="rId2"/>
-          <a:stretch>
-            <a:fillRect/>
-          </a:stretch>
-        </p:blipFill>
-        <p:spPr>
-          <a:xfrm>
-            <a:off x="1441637" y="1022685"/>
-            <a:ext cx="12844135" cy="6761748"/>
-          </a:xfrm>
-          <a:prstGeom prst="rect">
-            <a:avLst/>
-          </a:prstGeom>
-        </p:spPr>
-      </p:pic>
-    </p:spTree>
-    <p:extLst>
-      <p:ext uri="{BB962C8B-B14F-4D97-AF65-F5344CB8AC3E}">
-        <p14:creationId xmlns:p14="http://schemas.microsoft.com/office/powerpoint/2010/main" val="1679768556"/>
-      </p:ext>
-    </p:extLst>
-  </p:cSld>
-  <p:clrMapOvr>
-    <a:masterClrMapping/>
-  </p:clrMapOvr>
-</p:sld>
-</file>
-
-<file path=ppt/slides/slide3.xml><?xml version="1.0" encoding="utf-8"?>
-<p:sld xmlns:a="http://schemas.openxmlformats.org/drawingml/2006/main" xmlns:r="http://schemas.openxmlformats.org/officeDocument/2006/relationships" xmlns:p="http://schemas.openxmlformats.org/presentationml/2006/main">
-  <p:cSld>
-    <p:bg>
-      <p:bgPr>
-        <a:solidFill>
-          <a:schemeClr val="bg1"/>
-        </a:solidFill>
-        <a:effectLst/>
-      </p:bgPr>
-    </p:bg>
-    <p:spTree>
-      <p:nvGrpSpPr>
-        <p:cNvPr id="1" name="">
-          <a:extLst>
-            <a:ext uri="{FF2B5EF4-FFF2-40B4-BE49-F238E27FC236}">
               <a16:creationId xmlns:a16="http://schemas.microsoft.com/office/drawing/2014/main" id="{4F873820-7AA8-6C60-58B2-3AB1E6B473F6}"/>
             </a:ext>
           </a:extLst>
@@ -2237,7 +1864,7 @@
 </p:sld>
 </file>
 
-<file path=ppt/slides/slide4.xml><?xml version="1.0" encoding="utf-8"?>
+<file path=ppt/slides/slide3.xml><?xml version="1.0" encoding="utf-8"?>
 <p:sld xmlns:a="http://schemas.openxmlformats.org/drawingml/2006/main" xmlns:r="http://schemas.openxmlformats.org/officeDocument/2006/relationships" xmlns:p="http://schemas.openxmlformats.org/presentationml/2006/main">
   <p:cSld>
     <p:bg>
@@ -2601,6 +2228,379 @@
     <p:extLst>
       <p:ext uri="{BB962C8B-B14F-4D97-AF65-F5344CB8AC3E}">
         <p14:creationId xmlns:p14="http://schemas.microsoft.com/office/powerpoint/2010/main" val="1827149574"/>
+      </p:ext>
+    </p:extLst>
+  </p:cSld>
+  <p:clrMapOvr>
+    <a:masterClrMapping/>
+  </p:clrMapOvr>
+</p:sld>
+</file>
+
+<file path=ppt/slides/slide4.xml><?xml version="1.0" encoding="utf-8"?>
+<p:sld xmlns:a="http://schemas.openxmlformats.org/drawingml/2006/main" xmlns:r="http://schemas.openxmlformats.org/officeDocument/2006/relationships" xmlns:p="http://schemas.openxmlformats.org/presentationml/2006/main">
+  <p:cSld>
+    <p:bg>
+      <p:bgPr>
+        <a:solidFill>
+          <a:schemeClr val="bg1"/>
+        </a:solidFill>
+        <a:effectLst/>
+      </p:bgPr>
+    </p:bg>
+    <p:spTree>
+      <p:nvGrpSpPr>
+        <p:cNvPr id="1" name="">
+          <a:extLst>
+            <a:ext uri="{FF2B5EF4-FFF2-40B4-BE49-F238E27FC236}">
+              <a16:creationId xmlns:a16="http://schemas.microsoft.com/office/drawing/2014/main" id="{A43D90CE-AEC8-6053-08CE-F5ED06CD51BE}"/>
+            </a:ext>
+          </a:extLst>
+        </p:cNvPr>
+        <p:cNvGrpSpPr/>
+        <p:nvPr/>
+      </p:nvGrpSpPr>
+      <p:grpSpPr>
+        <a:xfrm>
+          <a:off x="0" y="0"/>
+          <a:ext cx="0" cy="0"/>
+          <a:chOff x="0" y="0"/>
+          <a:chExt cx="0" cy="0"/>
+        </a:xfrm>
+      </p:grpSpPr>
+      <p:sp useBgFill="1">
+        <p:nvSpPr>
+          <p:cNvPr id="8" name="Rectangle 7">
+            <a:extLst>
+              <a:ext uri="{FF2B5EF4-FFF2-40B4-BE49-F238E27FC236}">
+                <a16:creationId xmlns:a16="http://schemas.microsoft.com/office/drawing/2014/main" id="{DF87F4C6-44B0-3DF0-A216-7937BA93B0FA}"/>
+              </a:ext>
+              <a:ext uri="{C183D7F6-B498-43B3-948B-1728B52AA6E4}">
+                <adec:decorative xmlns:adec="http://schemas.microsoft.com/office/drawing/2017/decorative" val="1"/>
+              </a:ext>
+            </a:extLst>
+          </p:cNvPr>
+          <p:cNvSpPr>
+            <a:spLocks noGrp="1" noRot="1" noChangeAspect="1" noMove="1" noResize="1" noEditPoints="1" noAdjustHandles="1" noChangeArrowheads="1" noChangeShapeType="1" noTextEdit="1"/>
+          </p:cNvSpPr>
+          <p:nvPr>
+            <p:extLst>
+              <p:ext uri="{386F3935-93C4-4BCD-93E2-E3B085C9AB24}">
+                <p16:designElem xmlns:p16="http://schemas.microsoft.com/office/powerpoint/2015/main" val="1"/>
+              </p:ext>
+            </p:extLst>
+          </p:nvPr>
+        </p:nvSpPr>
+        <p:spPr>
+          <a:xfrm>
+            <a:off x="0" y="0"/>
+            <a:ext cx="14630400" cy="8229600"/>
+          </a:xfrm>
+          <a:prstGeom prst="rect">
+            <a:avLst/>
+          </a:prstGeom>
+          <a:ln w="12700" cap="flat" cmpd="sng" algn="ctr">
+            <a:noFill/>
+            <a:prstDash val="solid"/>
+            <a:miter lim="800000"/>
+          </a:ln>
+          <a:effectLst/>
+          <a:extLst>
+            <a:ext uri="{91240B29-F687-4F45-9708-019B960494DF}">
+              <a14:hiddenLine xmlns:a14="http://schemas.microsoft.com/office/drawing/2010/main" w="12700" cap="flat" cmpd="sng" algn="ctr">
+                <a:solidFill>
+                  <a:schemeClr val="accent1">
+                    <a:shade val="50000"/>
+                  </a:schemeClr>
+                </a:solidFill>
+                <a:prstDash val="solid"/>
+                <a:miter lim="800000"/>
+              </a14:hiddenLine>
+            </a:ext>
+          </a:extLst>
+        </p:spPr>
+        <p:style>
+          <a:lnRef idx="2">
+            <a:schemeClr val="accent1">
+              <a:shade val="50000"/>
+            </a:schemeClr>
+          </a:lnRef>
+          <a:fillRef idx="1">
+            <a:schemeClr val="accent1"/>
+          </a:fillRef>
+          <a:effectRef idx="0">
+            <a:schemeClr val="accent1"/>
+          </a:effectRef>
+          <a:fontRef idx="minor">
+            <a:schemeClr val="lt1"/>
+          </a:fontRef>
+        </p:style>
+        <p:txBody>
+          <a:bodyPr rtlCol="0" anchor="ctr"/>
+          <a:lstStyle/>
+          <a:p>
+            <a:pPr algn="ctr"/>
+            <a:endParaRPr lang="en-US"/>
+          </a:p>
+        </p:txBody>
+      </p:sp>
+      <p:sp>
+        <p:nvSpPr>
+          <p:cNvPr id="10" name="Rectangle 9">
+            <a:extLst>
+              <a:ext uri="{FF2B5EF4-FFF2-40B4-BE49-F238E27FC236}">
+                <a16:creationId xmlns:a16="http://schemas.microsoft.com/office/drawing/2014/main" id="{02576538-0C7E-4AF0-35F9-1BFA62FBD948}"/>
+              </a:ext>
+              <a:ext uri="{C183D7F6-B498-43B3-948B-1728B52AA6E4}">
+                <adec:decorative xmlns:adec="http://schemas.microsoft.com/office/drawing/2017/decorative" val="1"/>
+              </a:ext>
+            </a:extLst>
+          </p:cNvPr>
+          <p:cNvSpPr>
+            <a:spLocks noGrp="1" noRot="1" noChangeAspect="1" noMove="1" noResize="1" noEditPoints="1" noAdjustHandles="1" noChangeArrowheads="1" noChangeShapeType="1" noTextEdit="1"/>
+          </p:cNvSpPr>
+          <p:nvPr>
+            <p:extLst>
+              <p:ext uri="{386F3935-93C4-4BCD-93E2-E3B085C9AB24}">
+                <p16:designElem xmlns:p16="http://schemas.microsoft.com/office/powerpoint/2015/main" val="1"/>
+              </p:ext>
+            </p:extLst>
+          </p:nvPr>
+        </p:nvSpPr>
+        <p:spPr>
+          <a:xfrm rot="16200000" flipH="1">
+            <a:off x="3199940" y="-3199426"/>
+            <a:ext cx="8229600" cy="14629480"/>
+          </a:xfrm>
+          <a:prstGeom prst="rect">
+            <a:avLst/>
+          </a:prstGeom>
+          <a:gradFill>
+            <a:gsLst>
+              <a:gs pos="8000">
+                <a:schemeClr val="accent1"/>
+              </a:gs>
+              <a:gs pos="100000">
+                <a:schemeClr val="accent1">
+                  <a:lumMod val="50000"/>
+                </a:schemeClr>
+              </a:gs>
+            </a:gsLst>
+            <a:lin ang="12000000" scaled="0"/>
+          </a:gradFill>
+          <a:ln>
+            <a:noFill/>
+          </a:ln>
+        </p:spPr>
+        <p:style>
+          <a:lnRef idx="2">
+            <a:schemeClr val="accent1">
+              <a:shade val="50000"/>
+            </a:schemeClr>
+          </a:lnRef>
+          <a:fillRef idx="1">
+            <a:schemeClr val="accent1"/>
+          </a:fillRef>
+          <a:effectRef idx="0">
+            <a:schemeClr val="accent1"/>
+          </a:effectRef>
+          <a:fontRef idx="minor">
+            <a:schemeClr val="lt1"/>
+          </a:fontRef>
+        </p:style>
+        <p:txBody>
+          <a:bodyPr rtlCol="0" anchor="ctr"/>
+          <a:lstStyle/>
+          <a:p>
+            <a:pPr algn="ctr"/>
+            <a:endParaRPr lang="en-US"/>
+          </a:p>
+        </p:txBody>
+      </p:sp>
+      <p:sp>
+        <p:nvSpPr>
+          <p:cNvPr id="12" name="Rectangle 11">
+            <a:extLst>
+              <a:ext uri="{FF2B5EF4-FFF2-40B4-BE49-F238E27FC236}">
+                <a16:creationId xmlns:a16="http://schemas.microsoft.com/office/drawing/2014/main" id="{FC87A92D-B937-2642-5AA0-6891AC65C31B}"/>
+              </a:ext>
+              <a:ext uri="{C183D7F6-B498-43B3-948B-1728B52AA6E4}">
+                <adec:decorative xmlns:adec="http://schemas.microsoft.com/office/drawing/2017/decorative" val="1"/>
+              </a:ext>
+            </a:extLst>
+          </p:cNvPr>
+          <p:cNvSpPr>
+            <a:spLocks noGrp="1" noRot="1" noChangeAspect="1" noMove="1" noResize="1" noEditPoints="1" noAdjustHandles="1" noChangeArrowheads="1" noChangeShapeType="1" noTextEdit="1"/>
+          </p:cNvSpPr>
+          <p:nvPr>
+            <p:extLst>
+              <p:ext uri="{386F3935-93C4-4BCD-93E2-E3B085C9AB24}">
+                <p16:designElem xmlns:p16="http://schemas.microsoft.com/office/powerpoint/2015/main" val="1"/>
+              </p:ext>
+            </p:extLst>
+          </p:nvPr>
+        </p:nvSpPr>
+        <p:spPr>
+          <a:xfrm rot="10800000" flipH="1">
+            <a:off x="-2773" y="0"/>
+            <a:ext cx="10885015" cy="8229086"/>
+          </a:xfrm>
+          <a:prstGeom prst="rect">
+            <a:avLst/>
+          </a:prstGeom>
+          <a:gradFill>
+            <a:gsLst>
+              <a:gs pos="8000">
+                <a:srgbClr val="000000">
+                  <a:alpha val="52000"/>
+                </a:srgbClr>
+              </a:gs>
+              <a:gs pos="100000">
+                <a:schemeClr val="accent1"/>
+              </a:gs>
+            </a:gsLst>
+            <a:lin ang="4800000" scaled="0"/>
+          </a:gradFill>
+          <a:ln>
+            <a:noFill/>
+          </a:ln>
+        </p:spPr>
+        <p:style>
+          <a:lnRef idx="2">
+            <a:schemeClr val="accent1">
+              <a:shade val="50000"/>
+            </a:schemeClr>
+          </a:lnRef>
+          <a:fillRef idx="1">
+            <a:schemeClr val="accent1"/>
+          </a:fillRef>
+          <a:effectRef idx="0">
+            <a:schemeClr val="accent1"/>
+          </a:effectRef>
+          <a:fontRef idx="minor">
+            <a:schemeClr val="lt1"/>
+          </a:fontRef>
+        </p:style>
+        <p:txBody>
+          <a:bodyPr rtlCol="0" anchor="ctr"/>
+          <a:lstStyle/>
+          <a:p>
+            <a:pPr algn="ctr"/>
+            <a:endParaRPr lang="en-US"/>
+          </a:p>
+        </p:txBody>
+      </p:sp>
+      <p:sp>
+        <p:nvSpPr>
+          <p:cNvPr id="14" name="Rectangle 13">
+            <a:extLst>
+              <a:ext uri="{FF2B5EF4-FFF2-40B4-BE49-F238E27FC236}">
+                <a16:creationId xmlns:a16="http://schemas.microsoft.com/office/drawing/2014/main" id="{8E6B5650-EB2A-78DD-C945-5C4E76E9C52E}"/>
+              </a:ext>
+              <a:ext uri="{C183D7F6-B498-43B3-948B-1728B52AA6E4}">
+                <adec:decorative xmlns:adec="http://schemas.microsoft.com/office/drawing/2017/decorative" val="1"/>
+              </a:ext>
+            </a:extLst>
+          </p:cNvPr>
+          <p:cNvSpPr>
+            <a:spLocks noGrp="1" noRot="1" noChangeAspect="1" noMove="1" noResize="1" noEditPoints="1" noAdjustHandles="1" noChangeArrowheads="1" noChangeShapeType="1" noTextEdit="1"/>
+          </p:cNvSpPr>
+          <p:nvPr>
+            <p:extLst>
+              <p:ext uri="{386F3935-93C4-4BCD-93E2-E3B085C9AB24}">
+                <p16:designElem xmlns:p16="http://schemas.microsoft.com/office/powerpoint/2015/main" val="1"/>
+              </p:ext>
+            </p:extLst>
+          </p:nvPr>
+        </p:nvSpPr>
+        <p:spPr>
+          <a:xfrm rot="16200000" flipH="1">
+            <a:off x="4379389" y="-2023008"/>
+            <a:ext cx="5873477" cy="14632255"/>
+          </a:xfrm>
+          <a:prstGeom prst="rect">
+            <a:avLst/>
+          </a:prstGeom>
+          <a:gradFill>
+            <a:gsLst>
+              <a:gs pos="0">
+                <a:schemeClr val="accent5">
+                  <a:lumMod val="60000"/>
+                  <a:lumOff val="40000"/>
+                  <a:alpha val="0"/>
+                </a:schemeClr>
+              </a:gs>
+              <a:gs pos="100000">
+                <a:srgbClr val="000000">
+                  <a:alpha val="46000"/>
+                </a:srgbClr>
+              </a:gs>
+            </a:gsLst>
+            <a:lin ang="1200000" scaled="0"/>
+          </a:gradFill>
+          <a:ln>
+            <a:noFill/>
+          </a:ln>
+        </p:spPr>
+        <p:style>
+          <a:lnRef idx="2">
+            <a:schemeClr val="accent1">
+              <a:shade val="50000"/>
+            </a:schemeClr>
+          </a:lnRef>
+          <a:fillRef idx="1">
+            <a:schemeClr val="accent1"/>
+          </a:fillRef>
+          <a:effectRef idx="0">
+            <a:schemeClr val="accent1"/>
+          </a:effectRef>
+          <a:fontRef idx="minor">
+            <a:schemeClr val="lt1"/>
+          </a:fontRef>
+        </p:style>
+        <p:txBody>
+          <a:bodyPr rtlCol="0" anchor="ctr"/>
+          <a:lstStyle/>
+          <a:p>
+            <a:pPr algn="ctr"/>
+            <a:endParaRPr lang="en-US"/>
+          </a:p>
+        </p:txBody>
+      </p:sp>
+      <p:pic>
+        <p:nvPicPr>
+          <p:cNvPr id="4" name="Picture 3">
+            <a:extLst>
+              <a:ext uri="{FF2B5EF4-FFF2-40B4-BE49-F238E27FC236}">
+                <a16:creationId xmlns:a16="http://schemas.microsoft.com/office/drawing/2014/main" id="{D80DA688-E227-7D27-086A-A8CE66B55267}"/>
+              </a:ext>
+            </a:extLst>
+          </p:cNvPr>
+          <p:cNvPicPr>
+            <a:picLocks noChangeAspect="1"/>
+          </p:cNvPicPr>
+          <p:nvPr/>
+        </p:nvPicPr>
+        <p:blipFill>
+          <a:blip r:embed="rId2"/>
+          <a:stretch>
+            <a:fillRect/>
+          </a:stretch>
+        </p:blipFill>
+        <p:spPr>
+          <a:xfrm>
+            <a:off x="1441637" y="1022685"/>
+            <a:ext cx="12844135" cy="6761748"/>
+          </a:xfrm>
+          <a:prstGeom prst="rect">
+            <a:avLst/>
+          </a:prstGeom>
+        </p:spPr>
+      </p:pic>
+    </p:spTree>
+    <p:extLst>
+      <p:ext uri="{BB962C8B-B14F-4D97-AF65-F5344CB8AC3E}">
+        <p14:creationId xmlns:p14="http://schemas.microsoft.com/office/powerpoint/2010/main" val="1679768556"/>
       </p:ext>
     </p:extLst>
   </p:cSld>
